--- a/word-drafts/figures/AAS-Fig11-Registry.pptx
+++ b/word-drafts/figures/AAS-Fig11-Registry.pptx
@@ -7,7 +7,7 @@
   <p:sldIdLst>
     <p:sldId id="256" r:id="rId7"/>
   </p:sldIdLst>
-  <p:sldSz cx="7829550" cy="7772400" type="screen4x3"/>
+  <p:sldSz cx="10401300" cy="7772400" type="screen4x3"/>
   <p:notesSz cx="6858000" cy="9144000"/>
   <p:defaultTextStyle>
     <a:defPPr>
@@ -3096,7 +3096,7 @@
         </p:nvSpPr>
         <p:spPr>
           <a:xfrm>
-            <a:off x="247650" y="476250"/>
+            <a:off x="1533525" y="476250"/>
             <a:ext cx="2190750" cy="533400"/>
           </a:xfrm>
           <a:prstGeom prst="rect">
@@ -3155,7 +3155,7 @@
         </p:nvSpPr>
         <p:spPr>
           <a:xfrm>
-            <a:off x="2819400" y="476250"/>
+            <a:off x="4105275" y="476250"/>
             <a:ext cx="2190750" cy="533400"/>
           </a:xfrm>
           <a:prstGeom prst="rect">
@@ -3214,7 +3214,7 @@
         </p:nvSpPr>
         <p:spPr>
           <a:xfrm>
-            <a:off x="5391150" y="476250"/>
+            <a:off x="6677025" y="476250"/>
             <a:ext cx="2190750" cy="533400"/>
           </a:xfrm>
           <a:prstGeom prst="rect">
@@ -3273,7 +3273,7 @@
         </p:nvSpPr>
         <p:spPr>
           <a:xfrm>
-            <a:off x="2819400" y="1562100"/>
+            <a:off x="4105275" y="1562100"/>
             <a:ext cx="2190750" cy="533400"/>
           </a:xfrm>
           <a:prstGeom prst="rect">
@@ -3391,7 +3391,7 @@
         </p:nvSpPr>
         <p:spPr>
           <a:xfrm>
-            <a:off x="2819400" y="5905500"/>
+            <a:off x="4105275" y="5905500"/>
             <a:ext cx="2190750" cy="533400"/>
           </a:xfrm>
           <a:prstGeom prst="rect">
@@ -3450,7 +3450,7 @@
         </p:nvSpPr>
         <p:spPr>
           <a:xfrm>
-            <a:off x="247650" y="2647950"/>
+            <a:off x="5391150" y="3733800"/>
             <a:ext cx="2190750" cy="533400"/>
           </a:xfrm>
           <a:prstGeom prst="rect">
@@ -3464,6 +3464,11 @@
               <a:srgbClr val="444444"/>
             </a:solidFill>
           </a:ln>
+          <a:effectLst>
+            <a:outerShdw blurRad="0" dist="38100" dir="2700000" algn="tl" rotWithShape="0">
+              <a:srgbClr val="BFBFBF"/>
+            </a:outerShdw>
+          </a:effectLst>
         </p:spPr>
         <p:style>
           <a:lnRef idx="1">
@@ -3491,7 +3496,7 @@
                 </a:solidFill>
                 <a:latin typeface="Arial"/>
               </a:rPr>
-              <a:t>&lt;ShellGroup&gt;</a:t>
+              <a:t>AASEnvironmentFileType</a:t>
             </a:r>
           </a:p>
         </p:txBody>
@@ -3504,7 +3509,7 @@
         </p:nvSpPr>
         <p:spPr>
           <a:xfrm>
-            <a:off x="247650" y="4819650"/>
+            <a:off x="247650" y="2647950"/>
             <a:ext cx="2190750" cy="533400"/>
           </a:xfrm>
           <a:prstGeom prst="rect">
@@ -3545,20 +3550,128 @@
                 </a:solidFill>
                 <a:latin typeface="Arial"/>
               </a:rPr>
-              <a:t>&lt;Submodel&gt;</a:t>
-            </a:r>
-          </a:p>
-        </p:txBody>
-      </p:sp>
-      <p:sp>
-        <p:nvSpPr>
-          <p:cNvPr id="10" name="Rounded Rectangle 9"/>
+              <a:t>&lt;ShellGroup&gt;</a:t>
+            </a:r>
+          </a:p>
+        </p:txBody>
+      </p:sp>
+      <p:sp>
+        <p:nvSpPr>
+          <p:cNvPr id="10" name="Rectangle 9"/>
           <p:cNvSpPr/>
           <p:nvPr/>
         </p:nvSpPr>
         <p:spPr>
           <a:xfrm>
+            <a:off x="1533525" y="4819650"/>
+            <a:ext cx="2190750" cy="533400"/>
+          </a:xfrm>
+          <a:prstGeom prst="rect">
+            <a:avLst/>
+          </a:prstGeom>
+          <a:solidFill>
+            <a:srgbClr val="EEF3FA"/>
+          </a:solidFill>
+          <a:ln w="12700">
+            <a:solidFill>
+              <a:srgbClr val="444444"/>
+            </a:solidFill>
+          </a:ln>
+        </p:spPr>
+        <p:style>
+          <a:lnRef idx="1">
+            <a:schemeClr val="accent1"/>
+          </a:lnRef>
+          <a:fillRef idx="3">
+            <a:schemeClr val="accent1"/>
+          </a:fillRef>
+          <a:effectRef idx="2">
+            <a:schemeClr val="accent1"/>
+          </a:effectRef>
+          <a:fontRef idx="minor">
+            <a:schemeClr val="lt1"/>
+          </a:fontRef>
+        </p:style>
+        <p:txBody>
+          <a:bodyPr rtlCol="0" anchor="ctr" wrap="square"/>
+          <a:lstStyle/>
+          <a:p>
+            <a:pPr algn="ctr"/>
+            <a:r>
+              <a:rPr sz="900">
+                <a:solidFill>
+                  <a:srgbClr val="111111"/>
+                </a:solidFill>
+                <a:latin typeface="Arial"/>
+              </a:rPr>
+              <a:t>&lt;Submodel&gt;</a:t>
+            </a:r>
+          </a:p>
+        </p:txBody>
+      </p:sp>
+      <p:sp>
+        <p:nvSpPr>
+          <p:cNvPr id="11" name="Rectangle 10"/>
+          <p:cNvSpPr/>
+          <p:nvPr/>
+        </p:nvSpPr>
+        <p:spPr>
+          <a:xfrm>
             <a:off x="2819400" y="2647950"/>
+            <a:ext cx="2190750" cy="533400"/>
+          </a:xfrm>
+          <a:prstGeom prst="rect">
+            <a:avLst/>
+          </a:prstGeom>
+          <a:solidFill>
+            <a:srgbClr val="EEF3FA"/>
+          </a:solidFill>
+          <a:ln w="12700">
+            <a:solidFill>
+              <a:srgbClr val="444444"/>
+            </a:solidFill>
+          </a:ln>
+        </p:spPr>
+        <p:style>
+          <a:lnRef idx="1">
+            <a:schemeClr val="accent1"/>
+          </a:lnRef>
+          <a:fillRef idx="3">
+            <a:schemeClr val="accent1"/>
+          </a:fillRef>
+          <a:effectRef idx="2">
+            <a:schemeClr val="accent1"/>
+          </a:effectRef>
+          <a:fontRef idx="minor">
+            <a:schemeClr val="lt1"/>
+          </a:fontRef>
+        </p:style>
+        <p:txBody>
+          <a:bodyPr rtlCol="0" anchor="ctr" wrap="square"/>
+          <a:lstStyle/>
+          <a:p>
+            <a:pPr algn="ctr"/>
+            <a:r>
+              <a:rPr sz="900">
+                <a:solidFill>
+                  <a:srgbClr val="111111"/>
+                </a:solidFill>
+                <a:latin typeface="Arial"/>
+              </a:rPr>
+              <a:t>&lt;Environment&gt;</a:t>
+            </a:r>
+          </a:p>
+        </p:txBody>
+      </p:sp>
+      <p:sp>
+        <p:nvSpPr>
+          <p:cNvPr id="12" name="Rounded Rectangle 11"/>
+          <p:cNvSpPr/>
+          <p:nvPr/>
+        </p:nvSpPr>
+        <p:spPr>
+          <a:xfrm>
+            <a:off x="5391150" y="2647950"/>
             <a:ext cx="2190750" cy="533400"/>
           </a:xfrm>
           <a:prstGeom prst="roundRect">
@@ -3606,13 +3719,13 @@
       </p:sp>
       <p:sp>
         <p:nvSpPr>
-          <p:cNvPr id="11" name="Rounded Rectangle 10"/>
+          <p:cNvPr id="13" name="Rounded Rectangle 12"/>
           <p:cNvSpPr/>
           <p:nvPr/>
         </p:nvSpPr>
         <p:spPr>
           <a:xfrm>
-            <a:off x="5391150" y="2647950"/>
+            <a:off x="7962900" y="2647950"/>
             <a:ext cx="2190750" cy="533400"/>
           </a:xfrm>
           <a:prstGeom prst="roundRect">
@@ -3660,13 +3773,13 @@
       </p:sp>
       <p:sp>
         <p:nvSpPr>
-          <p:cNvPr id="12" name="Rectangle 11"/>
+          <p:cNvPr id="14" name="Rectangle 13"/>
           <p:cNvSpPr/>
           <p:nvPr/>
         </p:nvSpPr>
         <p:spPr>
           <a:xfrm>
-            <a:off x="2819400" y="4819650"/>
+            <a:off x="4105275" y="4819650"/>
             <a:ext cx="2190750" cy="533400"/>
           </a:xfrm>
           <a:prstGeom prst="rect">
@@ -3714,13 +3827,13 @@
       </p:sp>
       <p:sp>
         <p:nvSpPr>
-          <p:cNvPr id="13" name="Rectangle 12"/>
+          <p:cNvPr id="15" name="Rectangle 14"/>
           <p:cNvSpPr/>
           <p:nvPr/>
         </p:nvSpPr>
         <p:spPr>
           <a:xfrm>
-            <a:off x="2819400" y="6991350"/>
+            <a:off x="4105275" y="6991350"/>
             <a:ext cx="2190750" cy="533400"/>
           </a:xfrm>
           <a:prstGeom prst="rect">
@@ -3768,13 +3881,13 @@
       </p:sp>
       <p:sp>
         <p:nvSpPr>
-          <p:cNvPr id="14" name="Rectangle 13"/>
+          <p:cNvPr id="16" name="Rectangle 15"/>
           <p:cNvSpPr/>
           <p:nvPr/>
         </p:nvSpPr>
         <p:spPr>
           <a:xfrm>
-            <a:off x="5391150" y="4819650"/>
+            <a:off x="6677025" y="4819650"/>
             <a:ext cx="2190750" cy="533400"/>
           </a:xfrm>
           <a:prstGeom prst="rect">
@@ -3822,7 +3935,7 @@
       </p:sp>
       <p:cxnSp>
         <p:nvCxnSpPr>
-          <p:cNvPr id="15" name="Connector 14"/>
+          <p:cNvPr id="17" name="Connector 16"/>
           <p:cNvCxnSpPr>
             <a:stCxn id="2" idx="2"/>
             <a:endCxn id="5" idx="0"/>
@@ -3831,7 +3944,7 @@
         </p:nvCxnSpPr>
         <p:spPr>
           <a:xfrm>
-            <a:off x="1343025" y="1009650"/>
+            <a:off x="2628900" y="1009650"/>
             <a:ext cx="2571750" cy="552450"/>
           </a:xfrm>
           <a:prstGeom prst="bentConnector3">
@@ -3861,14 +3974,14 @@
       </p:cxnSp>
       <p:sp>
         <p:nvSpPr>
-          <p:cNvPr id="16" name="TextBox 15"/>
+          <p:cNvPr id="18" name="TextBox 17"/>
           <p:cNvSpPr txBox="1"/>
           <p:nvPr/>
         </p:nvSpPr>
         <p:spPr>
           <a:xfrm>
-            <a:off x="2667000" y="1228725"/>
-            <a:ext cx="485775" cy="123825"/>
+            <a:off x="3952875" y="1228725"/>
+            <a:ext cx="609600" cy="123825"/>
           </a:xfrm>
           <a:prstGeom prst="rect">
             <a:avLst/>
@@ -3894,7 +4007,7 @@
       </p:sp>
       <p:cxnSp>
         <p:nvCxnSpPr>
-          <p:cNvPr id="17" name="Connector 16"/>
+          <p:cNvPr id="19" name="Connector 18"/>
           <p:cNvCxnSpPr>
             <a:stCxn id="3" idx="2"/>
             <a:endCxn id="6" idx="0"/>
@@ -3902,9 +4015,9 @@
           <p:nvPr/>
         </p:nvCxnSpPr>
         <p:spPr>
-          <a:xfrm>
+          <a:xfrm flipH="1">
             <a:off x="3914775" y="1009650"/>
-            <a:ext cx="0" cy="2724150"/>
+            <a:ext cx="1285875" cy="2724150"/>
           </a:xfrm>
           <a:prstGeom prst="bentConnector3">
             <a:avLst/>
@@ -3933,14 +4046,14 @@
       </p:cxnSp>
       <p:sp>
         <p:nvSpPr>
-          <p:cNvPr id="18" name="TextBox 17"/>
+          <p:cNvPr id="20" name="TextBox 19"/>
           <p:cNvSpPr txBox="1"/>
           <p:nvPr/>
         </p:nvSpPr>
         <p:spPr>
           <a:xfrm>
-            <a:off x="3952875" y="2314575"/>
-            <a:ext cx="485775" cy="123825"/>
+            <a:off x="4595812" y="2314575"/>
+            <a:ext cx="609600" cy="123825"/>
           </a:xfrm>
           <a:prstGeom prst="rect">
             <a:avLst/>
@@ -3966,7 +4079,7 @@
       </p:sp>
       <p:cxnSp>
         <p:nvCxnSpPr>
-          <p:cNvPr id="19" name="Connector 18"/>
+          <p:cNvPr id="21" name="Connector 20"/>
           <p:cNvCxnSpPr>
             <a:stCxn id="4" idx="2"/>
             <a:endCxn id="7" idx="0"/>
@@ -3975,7 +4088,7 @@
         </p:nvCxnSpPr>
         <p:spPr>
           <a:xfrm flipH="1">
-            <a:off x="3914775" y="1009650"/>
+            <a:off x="5200650" y="1009650"/>
             <a:ext cx="2571750" cy="4895850"/>
           </a:xfrm>
           <a:prstGeom prst="bentConnector3">
@@ -4005,14 +4118,14 @@
       </p:cxnSp>
       <p:sp>
         <p:nvSpPr>
-          <p:cNvPr id="20" name="TextBox 19"/>
+          <p:cNvPr id="22" name="TextBox 21"/>
           <p:cNvSpPr txBox="1"/>
           <p:nvPr/>
         </p:nvSpPr>
         <p:spPr>
           <a:xfrm>
-            <a:off x="5238750" y="3400425"/>
-            <a:ext cx="485775" cy="123825"/>
+            <a:off x="6524625" y="3400425"/>
+            <a:ext cx="609600" cy="123825"/>
           </a:xfrm>
           <a:prstGeom prst="rect">
             <a:avLst/>
@@ -4038,17 +4151,17 @@
       </p:sp>
       <p:cxnSp>
         <p:nvCxnSpPr>
-          <p:cNvPr id="21" name="Connector 20"/>
+          <p:cNvPr id="23" name="Connector 22"/>
           <p:cNvCxnSpPr>
-            <a:stCxn id="5" idx="2"/>
+            <a:stCxn id="4" idx="2"/>
             <a:endCxn id="8" idx="0"/>
           </p:cNvCxnSpPr>
           <p:nvPr/>
         </p:nvCxnSpPr>
         <p:spPr>
           <a:xfrm flipH="1">
-            <a:off x="1343025" y="2095500"/>
-            <a:ext cx="2571750" cy="552450"/>
+            <a:off x="6486525" y="1009650"/>
+            <a:ext cx="1285875" cy="2724150"/>
           </a:xfrm>
           <a:prstGeom prst="bentConnector3">
             <a:avLst/>
@@ -4077,14 +4190,14 @@
       </p:cxnSp>
       <p:sp>
         <p:nvSpPr>
-          <p:cNvPr id="22" name="TextBox 21"/>
+          <p:cNvPr id="24" name="TextBox 23"/>
           <p:cNvSpPr txBox="1"/>
           <p:nvPr/>
         </p:nvSpPr>
         <p:spPr>
           <a:xfrm>
-            <a:off x="2667000" y="2314575"/>
-            <a:ext cx="428625" cy="123825"/>
+            <a:off x="7167562" y="2314575"/>
+            <a:ext cx="609600" cy="123825"/>
           </a:xfrm>
           <a:prstGeom prst="rect">
             <a:avLst/>
@@ -4103,24 +4216,24 @@
                   <a:srgbClr val="444444"/>
                 </a:solidFill>
               </a:rPr>
-              <a:t>Organizes</a:t>
+              <a:t>HasSubtype</a:t>
             </a:r>
           </a:p>
         </p:txBody>
       </p:sp>
       <p:cxnSp>
         <p:nvCxnSpPr>
-          <p:cNvPr id="23" name="Connector 22"/>
+          <p:cNvPr id="25" name="Connector 24"/>
           <p:cNvCxnSpPr>
             <a:stCxn id="5" idx="2"/>
-            <a:endCxn id="10" idx="0"/>
+            <a:endCxn id="9" idx="0"/>
           </p:cNvCxnSpPr>
           <p:nvPr/>
         </p:nvCxnSpPr>
         <p:spPr>
-          <a:xfrm>
-            <a:off x="3914775" y="2095500"/>
-            <a:ext cx="0" cy="552450"/>
+          <a:xfrm flipH="1">
+            <a:off x="1343025" y="2095500"/>
+            <a:ext cx="3857625" cy="552450"/>
           </a:xfrm>
           <a:prstGeom prst="bentConnector3">
             <a:avLst/>
@@ -4149,14 +4262,14 @@
       </p:cxnSp>
       <p:sp>
         <p:nvSpPr>
-          <p:cNvPr id="24" name="TextBox 23"/>
+          <p:cNvPr id="26" name="TextBox 25"/>
           <p:cNvSpPr txBox="1"/>
           <p:nvPr/>
         </p:nvSpPr>
         <p:spPr>
           <a:xfrm>
-            <a:off x="3952875" y="2457450"/>
-            <a:ext cx="619125" cy="123825"/>
+            <a:off x="3309937" y="2314575"/>
+            <a:ext cx="533400" cy="123825"/>
           </a:xfrm>
           <a:prstGeom prst="rect">
             <a:avLst/>
@@ -4175,14 +4288,14 @@
                   <a:srgbClr val="444444"/>
                 </a:solidFill>
               </a:rPr>
-              <a:t>HasComponent</a:t>
+              <a:t>Organizes</a:t>
             </a:r>
           </a:p>
         </p:txBody>
       </p:sp>
       <p:cxnSp>
         <p:nvCxnSpPr>
-          <p:cNvPr id="25" name="Connector 24"/>
+          <p:cNvPr id="27" name="Connector 26"/>
           <p:cNvCxnSpPr>
             <a:stCxn id="5" idx="2"/>
             <a:endCxn id="11" idx="0"/>
@@ -4190,9 +4303,9 @@
           <p:nvPr/>
         </p:nvCxnSpPr>
         <p:spPr>
-          <a:xfrm>
+          <a:xfrm flipH="1">
             <a:off x="3914775" y="2095500"/>
-            <a:ext cx="2571750" cy="552450"/>
+            <a:ext cx="1285875" cy="552450"/>
           </a:xfrm>
           <a:prstGeom prst="bentConnector3">
             <a:avLst/>
@@ -4221,14 +4334,86 @@
       </p:cxnSp>
       <p:sp>
         <p:nvSpPr>
-          <p:cNvPr id="26" name="TextBox 25"/>
+          <p:cNvPr id="28" name="TextBox 27"/>
           <p:cNvSpPr txBox="1"/>
           <p:nvPr/>
         </p:nvSpPr>
         <p:spPr>
           <a:xfrm>
-            <a:off x="5238750" y="2314575"/>
-            <a:ext cx="619125" cy="123825"/>
+            <a:off x="4595812" y="2457450"/>
+            <a:ext cx="533400" cy="123825"/>
+          </a:xfrm>
+          <a:prstGeom prst="rect">
+            <a:avLst/>
+          </a:prstGeom>
+          <a:noFill/>
+        </p:spPr>
+        <p:txBody>
+          <a:bodyPr wrap="none" lIns="0" rIns="0" tIns="0" bIns="0">
+            <a:spAutoFit/>
+          </a:bodyPr>
+          <a:lstStyle/>
+          <a:p>
+            <a:r>
+              <a:rPr sz="800">
+                <a:solidFill>
+                  <a:srgbClr val="444444"/>
+                </a:solidFill>
+              </a:rPr>
+              <a:t>Organizes</a:t>
+            </a:r>
+          </a:p>
+        </p:txBody>
+      </p:sp>
+      <p:cxnSp>
+        <p:nvCxnSpPr>
+          <p:cNvPr id="29" name="Connector 28"/>
+          <p:cNvCxnSpPr>
+            <a:stCxn id="5" idx="2"/>
+            <a:endCxn id="12" idx="0"/>
+          </p:cNvCxnSpPr>
+          <p:nvPr/>
+        </p:nvCxnSpPr>
+        <p:spPr>
+          <a:xfrm>
+            <a:off x="5200650" y="2095500"/>
+            <a:ext cx="1285875" cy="552450"/>
+          </a:xfrm>
+          <a:prstGeom prst="bentConnector3">
+            <a:avLst/>
+          </a:prstGeom>
+          <a:ln w="12700">
+            <a:solidFill>
+              <a:srgbClr val="444444"/>
+            </a:solidFill>
+            <a:tailEnd type="stealth" w="med" len="med"/>
+          </a:ln>
+        </p:spPr>
+        <p:style>
+          <a:lnRef idx="2">
+            <a:schemeClr val="accent1"/>
+          </a:lnRef>
+          <a:fillRef idx="0">
+            <a:schemeClr val="accent1"/>
+          </a:fillRef>
+          <a:effectRef idx="1">
+            <a:schemeClr val="accent1"/>
+          </a:effectRef>
+          <a:fontRef idx="minor">
+            <a:schemeClr val="tx1"/>
+          </a:fontRef>
+        </p:style>
+      </p:cxnSp>
+      <p:sp>
+        <p:nvSpPr>
+          <p:cNvPr id="30" name="TextBox 29"/>
+          <p:cNvSpPr txBox="1"/>
+          <p:nvPr/>
+        </p:nvSpPr>
+        <p:spPr>
+          <a:xfrm>
+            <a:off x="5881687" y="2314575"/>
+            <a:ext cx="762000" cy="123825"/>
           </a:xfrm>
           <a:prstGeom prst="rect">
             <a:avLst/>
@@ -4254,9 +4439,81 @@
       </p:sp>
       <p:cxnSp>
         <p:nvCxnSpPr>
-          <p:cNvPr id="27" name="Connector 26"/>
+          <p:cNvPr id="31" name="Connector 30"/>
           <p:cNvCxnSpPr>
-            <a:stCxn id="8" idx="2"/>
+            <a:stCxn id="5" idx="2"/>
+            <a:endCxn id="13" idx="0"/>
+          </p:cNvCxnSpPr>
+          <p:nvPr/>
+        </p:nvCxnSpPr>
+        <p:spPr>
+          <a:xfrm>
+            <a:off x="5200650" y="2095500"/>
+            <a:ext cx="3857625" cy="552450"/>
+          </a:xfrm>
+          <a:prstGeom prst="bentConnector3">
+            <a:avLst/>
+          </a:prstGeom>
+          <a:ln w="12700">
+            <a:solidFill>
+              <a:srgbClr val="444444"/>
+            </a:solidFill>
+            <a:tailEnd type="stealth" w="med" len="med"/>
+          </a:ln>
+        </p:spPr>
+        <p:style>
+          <a:lnRef idx="2">
+            <a:schemeClr val="accent1"/>
+          </a:lnRef>
+          <a:fillRef idx="0">
+            <a:schemeClr val="accent1"/>
+          </a:fillRef>
+          <a:effectRef idx="1">
+            <a:schemeClr val="accent1"/>
+          </a:effectRef>
+          <a:fontRef idx="minor">
+            <a:schemeClr val="tx1"/>
+          </a:fontRef>
+        </p:style>
+      </p:cxnSp>
+      <p:sp>
+        <p:nvSpPr>
+          <p:cNvPr id="32" name="TextBox 31"/>
+          <p:cNvSpPr txBox="1"/>
+          <p:nvPr/>
+        </p:nvSpPr>
+        <p:spPr>
+          <a:xfrm>
+            <a:off x="7167562" y="2457450"/>
+            <a:ext cx="762000" cy="123825"/>
+          </a:xfrm>
+          <a:prstGeom prst="rect">
+            <a:avLst/>
+          </a:prstGeom>
+          <a:noFill/>
+        </p:spPr>
+        <p:txBody>
+          <a:bodyPr wrap="none" lIns="0" rIns="0" tIns="0" bIns="0">
+            <a:spAutoFit/>
+          </a:bodyPr>
+          <a:lstStyle/>
+          <a:p>
+            <a:r>
+              <a:rPr sz="800">
+                <a:solidFill>
+                  <a:srgbClr val="444444"/>
+                </a:solidFill>
+              </a:rPr>
+              <a:t>HasComponent</a:t>
+            </a:r>
+          </a:p>
+        </p:txBody>
+      </p:sp>
+      <p:cxnSp>
+        <p:nvCxnSpPr>
+          <p:cNvPr id="33" name="Connector 32"/>
+          <p:cNvCxnSpPr>
+            <a:stCxn id="9" idx="2"/>
             <a:endCxn id="6" idx="0"/>
           </p:cNvCxnSpPr>
           <p:nvPr/>
@@ -4293,17 +4550,17 @@
       </p:cxnSp>
       <p:cxnSp>
         <p:nvCxnSpPr>
-          <p:cNvPr id="28" name="Connector 27"/>
+          <p:cNvPr id="34" name="Connector 33"/>
           <p:cNvCxnSpPr>
             <a:stCxn id="6" idx="2"/>
-            <a:endCxn id="9" idx="0"/>
+            <a:endCxn id="10" idx="0"/>
           </p:cNvCxnSpPr>
           <p:nvPr/>
         </p:nvCxnSpPr>
         <p:spPr>
           <a:xfrm flipH="1">
-            <a:off x="1343025" y="4267200"/>
-            <a:ext cx="2571750" cy="552450"/>
+            <a:off x="2628900" y="4267200"/>
+            <a:ext cx="1285875" cy="552450"/>
           </a:xfrm>
           <a:prstGeom prst="bentConnector3">
             <a:avLst/>
@@ -4332,14 +4589,14 @@
       </p:cxnSp>
       <p:sp>
         <p:nvSpPr>
-          <p:cNvPr id="29" name="TextBox 28"/>
+          <p:cNvPr id="35" name="TextBox 34"/>
           <p:cNvSpPr txBox="1"/>
           <p:nvPr/>
         </p:nvSpPr>
         <p:spPr>
           <a:xfrm>
-            <a:off x="2667000" y="4486275"/>
-            <a:ext cx="428625" cy="123825"/>
+            <a:off x="3309937" y="4486275"/>
+            <a:ext cx="533400" cy="123825"/>
           </a:xfrm>
           <a:prstGeom prst="rect">
             <a:avLst/>
@@ -4365,16 +4622,16 @@
       </p:sp>
       <p:cxnSp>
         <p:nvCxnSpPr>
-          <p:cNvPr id="30" name="Connector 29"/>
+          <p:cNvPr id="36" name="Connector 35"/>
           <p:cNvCxnSpPr>
-            <a:stCxn id="9" idx="2"/>
+            <a:stCxn id="10" idx="2"/>
             <a:endCxn id="7" idx="0"/>
           </p:cNvCxnSpPr>
           <p:nvPr/>
         </p:nvCxnSpPr>
         <p:spPr>
           <a:xfrm>
-            <a:off x="1343025" y="5353050"/>
+            <a:off x="2628900" y="5353050"/>
             <a:ext cx="2571750" cy="552450"/>
           </a:xfrm>
           <a:prstGeom prst="bentConnector3">
@@ -4404,17 +4661,56 @@
       </p:cxnSp>
       <p:cxnSp>
         <p:nvCxnSpPr>
-          <p:cNvPr id="31" name="Connector 30"/>
+          <p:cNvPr id="37" name="Connector 36"/>
           <p:cNvCxnSpPr>
-            <a:stCxn id="6" idx="2"/>
-            <a:endCxn id="12" idx="0"/>
+            <a:stCxn id="11" idx="2"/>
+            <a:endCxn id="8" idx="0"/>
           </p:cNvCxnSpPr>
           <p:nvPr/>
         </p:nvCxnSpPr>
         <p:spPr>
           <a:xfrm>
+            <a:off x="3914775" y="3181350"/>
+            <a:ext cx="2571750" cy="552450"/>
+          </a:xfrm>
+          <a:prstGeom prst="bentConnector3">
+            <a:avLst/>
+          </a:prstGeom>
+          <a:ln w="12700">
+            <a:solidFill>
+              <a:srgbClr val="444444"/>
+            </a:solidFill>
+            <a:tailEnd type="triangle" w="lg" len="lg"/>
+          </a:ln>
+        </p:spPr>
+        <p:style>
+          <a:lnRef idx="2">
+            <a:schemeClr val="accent1"/>
+          </a:lnRef>
+          <a:fillRef idx="0">
+            <a:schemeClr val="accent1"/>
+          </a:fillRef>
+          <a:effectRef idx="1">
+            <a:schemeClr val="accent1"/>
+          </a:effectRef>
+          <a:fontRef idx="minor">
+            <a:schemeClr val="tx1"/>
+          </a:fontRef>
+        </p:style>
+      </p:cxnSp>
+      <p:cxnSp>
+        <p:nvCxnSpPr>
+          <p:cNvPr id="38" name="Connector 37"/>
+          <p:cNvCxnSpPr>
+            <a:stCxn id="6" idx="2"/>
+            <a:endCxn id="14" idx="0"/>
+          </p:cNvCxnSpPr>
+          <p:nvPr/>
+        </p:nvCxnSpPr>
+        <p:spPr>
+          <a:xfrm>
             <a:off x="3914775" y="4267200"/>
-            <a:ext cx="0" cy="552450"/>
+            <a:ext cx="1285875" cy="552450"/>
           </a:xfrm>
           <a:prstGeom prst="bentConnector3">
             <a:avLst/>
@@ -4443,14 +4739,14 @@
       </p:cxnSp>
       <p:sp>
         <p:nvSpPr>
-          <p:cNvPr id="32" name="TextBox 31"/>
+          <p:cNvPr id="39" name="TextBox 38"/>
           <p:cNvSpPr txBox="1"/>
           <p:nvPr/>
         </p:nvSpPr>
         <p:spPr>
           <a:xfrm>
-            <a:off x="3952875" y="4486275"/>
-            <a:ext cx="495300" cy="123825"/>
+            <a:off x="4595812" y="4486275"/>
+            <a:ext cx="619125" cy="123825"/>
           </a:xfrm>
           <a:prstGeom prst="rect">
             <a:avLst/>
@@ -4476,17 +4772,17 @@
       </p:sp>
       <p:cxnSp>
         <p:nvCxnSpPr>
-          <p:cNvPr id="33" name="Connector 32"/>
+          <p:cNvPr id="40" name="Connector 39"/>
           <p:cNvCxnSpPr>
             <a:stCxn id="6" idx="2"/>
-            <a:endCxn id="14" idx="0"/>
+            <a:endCxn id="16" idx="0"/>
           </p:cNvCxnSpPr>
           <p:nvPr/>
         </p:nvCxnSpPr>
         <p:spPr>
           <a:xfrm>
             <a:off x="3914775" y="4267200"/>
-            <a:ext cx="2571750" cy="552450"/>
+            <a:ext cx="3857625" cy="552450"/>
           </a:xfrm>
           <a:prstGeom prst="bentConnector3">
             <a:avLst/>
@@ -4515,14 +4811,14 @@
       </p:cxnSp>
       <p:sp>
         <p:nvSpPr>
-          <p:cNvPr id="34" name="TextBox 33"/>
+          <p:cNvPr id="41" name="TextBox 40"/>
           <p:cNvSpPr txBox="1"/>
           <p:nvPr/>
         </p:nvSpPr>
         <p:spPr>
           <a:xfrm>
-            <a:off x="5238750" y="4486275"/>
-            <a:ext cx="495300" cy="123825"/>
+            <a:off x="5881687" y="4486275"/>
+            <a:ext cx="619125" cy="123825"/>
           </a:xfrm>
           <a:prstGeom prst="rect">
             <a:avLst/>
@@ -4548,16 +4844,16 @@
       </p:sp>
       <p:cxnSp>
         <p:nvCxnSpPr>
-          <p:cNvPr id="35" name="Connector 34"/>
+          <p:cNvPr id="42" name="Connector 41"/>
           <p:cNvCxnSpPr>
             <a:stCxn id="7" idx="2"/>
-            <a:endCxn id="13" idx="0"/>
+            <a:endCxn id="15" idx="0"/>
           </p:cNvCxnSpPr>
           <p:nvPr/>
         </p:nvCxnSpPr>
         <p:spPr>
           <a:xfrm>
-            <a:off x="3914775" y="6438900"/>
+            <a:off x="5200650" y="6438900"/>
             <a:ext cx="0" cy="552450"/>
           </a:xfrm>
           <a:prstGeom prst="bentConnector3">
@@ -4587,14 +4883,14 @@
       </p:cxnSp>
       <p:sp>
         <p:nvSpPr>
-          <p:cNvPr id="36" name="TextBox 35"/>
+          <p:cNvPr id="43" name="TextBox 42"/>
           <p:cNvSpPr txBox="1"/>
           <p:nvPr/>
         </p:nvSpPr>
         <p:spPr>
           <a:xfrm>
-            <a:off x="3952875" y="6657975"/>
-            <a:ext cx="495300" cy="123825"/>
+            <a:off x="5238750" y="6657975"/>
+            <a:ext cx="619125" cy="123825"/>
           </a:xfrm>
           <a:prstGeom prst="rect">
             <a:avLst/>
